--- a/모든 첨부이미지.pptx
+++ b/모든 첨부이미지.pptx
@@ -5,7 +5,7 @@
     <p:sldMasterId id="2147483648" r:id="rId1"/>
   </p:sldMasterIdLst>
   <p:notesMasterIdLst>
-    <p:notesMasterId r:id="rId17"/>
+    <p:notesMasterId r:id="rId19"/>
   </p:notesMasterIdLst>
   <p:sldIdLst>
     <p:sldId id="256" r:id="rId2"/>
@@ -15,14 +15,16 @@
     <p:sldId id="260" r:id="rId6"/>
     <p:sldId id="261" r:id="rId7"/>
     <p:sldId id="262" r:id="rId8"/>
-    <p:sldId id="270" r:id="rId9"/>
-    <p:sldId id="263" r:id="rId10"/>
-    <p:sldId id="264" r:id="rId11"/>
-    <p:sldId id="265" r:id="rId12"/>
-    <p:sldId id="266" r:id="rId13"/>
-    <p:sldId id="267" r:id="rId14"/>
-    <p:sldId id="268" r:id="rId15"/>
-    <p:sldId id="269" r:id="rId16"/>
+    <p:sldId id="272" r:id="rId9"/>
+    <p:sldId id="270" r:id="rId10"/>
+    <p:sldId id="271" r:id="rId11"/>
+    <p:sldId id="263" r:id="rId12"/>
+    <p:sldId id="264" r:id="rId13"/>
+    <p:sldId id="265" r:id="rId14"/>
+    <p:sldId id="266" r:id="rId15"/>
+    <p:sldId id="267" r:id="rId16"/>
+    <p:sldId id="268" r:id="rId17"/>
+    <p:sldId id="269" r:id="rId18"/>
   </p:sldIdLst>
   <p:sldSz cx="12192000" cy="6858000"/>
   <p:notesSz cx="6858000" cy="9144000"/>
@@ -222,7 +224,7 @@
           <a:p>
             <a:fld id="{8D4890FB-6FE1-4844-A158-C3691ABD9614}" type="datetimeFigureOut">
               <a:rPr lang="ko-KR" altLang="en-US" smtClean="0"/>
-              <a:t>2026-07-02</a:t>
+              <a:t>2026-07-03</a:t>
             </a:fld>
             <a:endParaRPr lang="ko-KR" altLang="en-US"/>
           </a:p>
@@ -720,7 +722,7 @@
           <a:p>
             <a:fld id="{E9004D24-265E-472F-8520-1152370C2B6E}" type="datetimeFigureOut">
               <a:rPr lang="ko-KR" altLang="en-US" smtClean="0"/>
-              <a:t>2026-07-02</a:t>
+              <a:t>2026-07-03</a:t>
             </a:fld>
             <a:endParaRPr lang="ko-KR" altLang="en-US"/>
           </a:p>
@@ -918,7 +920,7 @@
           <a:p>
             <a:fld id="{E9004D24-265E-472F-8520-1152370C2B6E}" type="datetimeFigureOut">
               <a:rPr lang="ko-KR" altLang="en-US" smtClean="0"/>
-              <a:t>2026-07-02</a:t>
+              <a:t>2026-07-03</a:t>
             </a:fld>
             <a:endParaRPr lang="ko-KR" altLang="en-US"/>
           </a:p>
@@ -1126,7 +1128,7 @@
           <a:p>
             <a:fld id="{E9004D24-265E-472F-8520-1152370C2B6E}" type="datetimeFigureOut">
               <a:rPr lang="ko-KR" altLang="en-US" smtClean="0"/>
-              <a:t>2026-07-02</a:t>
+              <a:t>2026-07-03</a:t>
             </a:fld>
             <a:endParaRPr lang="ko-KR" altLang="en-US"/>
           </a:p>
@@ -1324,7 +1326,7 @@
           <a:p>
             <a:fld id="{E9004D24-265E-472F-8520-1152370C2B6E}" type="datetimeFigureOut">
               <a:rPr lang="ko-KR" altLang="en-US" smtClean="0"/>
-              <a:t>2026-07-02</a:t>
+              <a:t>2026-07-03</a:t>
             </a:fld>
             <a:endParaRPr lang="ko-KR" altLang="en-US"/>
           </a:p>
@@ -1599,7 +1601,7 @@
           <a:p>
             <a:fld id="{E9004D24-265E-472F-8520-1152370C2B6E}" type="datetimeFigureOut">
               <a:rPr lang="ko-KR" altLang="en-US" smtClean="0"/>
-              <a:t>2026-07-02</a:t>
+              <a:t>2026-07-03</a:t>
             </a:fld>
             <a:endParaRPr lang="ko-KR" altLang="en-US"/>
           </a:p>
@@ -1864,7 +1866,7 @@
           <a:p>
             <a:fld id="{E9004D24-265E-472F-8520-1152370C2B6E}" type="datetimeFigureOut">
               <a:rPr lang="ko-KR" altLang="en-US" smtClean="0"/>
-              <a:t>2026-07-02</a:t>
+              <a:t>2026-07-03</a:t>
             </a:fld>
             <a:endParaRPr lang="ko-KR" altLang="en-US"/>
           </a:p>
@@ -2276,7 +2278,7 @@
           <a:p>
             <a:fld id="{E9004D24-265E-472F-8520-1152370C2B6E}" type="datetimeFigureOut">
               <a:rPr lang="ko-KR" altLang="en-US" smtClean="0"/>
-              <a:t>2026-07-02</a:t>
+              <a:t>2026-07-03</a:t>
             </a:fld>
             <a:endParaRPr lang="ko-KR" altLang="en-US"/>
           </a:p>
@@ -2417,7 +2419,7 @@
           <a:p>
             <a:fld id="{E9004D24-265E-472F-8520-1152370C2B6E}" type="datetimeFigureOut">
               <a:rPr lang="ko-KR" altLang="en-US" smtClean="0"/>
-              <a:t>2026-07-02</a:t>
+              <a:t>2026-07-03</a:t>
             </a:fld>
             <a:endParaRPr lang="ko-KR" altLang="en-US"/>
           </a:p>
@@ -2530,7 +2532,7 @@
           <a:p>
             <a:fld id="{E9004D24-265E-472F-8520-1152370C2B6E}" type="datetimeFigureOut">
               <a:rPr lang="ko-KR" altLang="en-US" smtClean="0"/>
-              <a:t>2026-07-02</a:t>
+              <a:t>2026-07-03</a:t>
             </a:fld>
             <a:endParaRPr lang="ko-KR" altLang="en-US"/>
           </a:p>
@@ -2841,7 +2843,7 @@
           <a:p>
             <a:fld id="{E9004D24-265E-472F-8520-1152370C2B6E}" type="datetimeFigureOut">
               <a:rPr lang="ko-KR" altLang="en-US" smtClean="0"/>
-              <a:t>2026-07-02</a:t>
+              <a:t>2026-07-03</a:t>
             </a:fld>
             <a:endParaRPr lang="ko-KR" altLang="en-US"/>
           </a:p>
@@ -3129,7 +3131,7 @@
           <a:p>
             <a:fld id="{E9004D24-265E-472F-8520-1152370C2B6E}" type="datetimeFigureOut">
               <a:rPr lang="ko-KR" altLang="en-US" smtClean="0"/>
-              <a:t>2026-07-02</a:t>
+              <a:t>2026-07-03</a:t>
             </a:fld>
             <a:endParaRPr lang="ko-KR" altLang="en-US"/>
           </a:p>
@@ -3370,7 +3372,7 @@
           <a:p>
             <a:fld id="{E9004D24-265E-472F-8520-1152370C2B6E}" type="datetimeFigureOut">
               <a:rPr lang="ko-KR" altLang="en-US" smtClean="0"/>
-              <a:t>2026-07-02</a:t>
+              <a:t>2026-07-03</a:t>
             </a:fld>
             <a:endParaRPr lang="ko-KR" altLang="en-US"/>
           </a:p>
@@ -3914,10 +3916,45 @@
       </p:grpSpPr>
       <p:pic>
         <p:nvPicPr>
-          <p:cNvPr id="9217" name="_x624180128">
-            <a:extLst>
-              <a:ext uri="{FF2B5EF4-FFF2-40B4-BE49-F238E27FC236}">
-                <a16:creationId xmlns:a16="http://schemas.microsoft.com/office/drawing/2014/main" id="{5FDA25BE-F238-4A92-A1D5-F5059ACED416}"/>
+          <p:cNvPr id="12" name="그림 11">
+            <a:extLst>
+              <a:ext uri="{FF2B5EF4-FFF2-40B4-BE49-F238E27FC236}">
+                <a16:creationId xmlns:a16="http://schemas.microsoft.com/office/drawing/2014/main" id="{98F21008-B7BC-4866-A8AD-F5F84F691F2D}"/>
+              </a:ext>
+            </a:extLst>
+          </p:cNvPr>
+          <p:cNvPicPr>
+            <a:picLocks noChangeAspect="1"/>
+          </p:cNvPicPr>
+          <p:nvPr/>
+        </p:nvPicPr>
+        <p:blipFill rotWithShape="1">
+          <a:blip r:embed="rId2">
+            <a:extLst>
+              <a:ext uri="{28A0092B-C50C-407E-A947-70E740481C1C}">
+                <a14:useLocalDpi xmlns:a14="http://schemas.microsoft.com/office/drawing/2010/main" val="0"/>
+              </a:ext>
+            </a:extLst>
+          </a:blip>
+          <a:srcRect l="6511" t="86916"/>
+          <a:stretch/>
+        </p:blipFill>
+        <p:spPr>
+          <a:xfrm>
+            <a:off x="6224111" y="4547938"/>
+            <a:ext cx="4699822" cy="358818"/>
+          </a:xfrm>
+          <a:prstGeom prst="rect">
+            <a:avLst/>
+          </a:prstGeom>
+        </p:spPr>
+      </p:pic>
+      <p:pic>
+        <p:nvPicPr>
+          <p:cNvPr id="14" name="_x624178472">
+            <a:extLst>
+              <a:ext uri="{FF2B5EF4-FFF2-40B4-BE49-F238E27FC236}">
+                <a16:creationId xmlns:a16="http://schemas.microsoft.com/office/drawing/2014/main" id="{32C7BC04-72F4-4955-952E-4D6651CF6419}"/>
               </a:ext>
             </a:extLst>
           </p:cNvPr>
@@ -3927,7 +3964,7 @@
           <p:nvPr/>
         </p:nvPicPr>
         <p:blipFill>
-          <a:blip r:embed="rId2">
+          <a:blip r:embed="rId3">
             <a:extLst>
               <a:ext uri="{28A0092B-C50C-407E-A947-70E740481C1C}">
                 <a14:useLocalDpi xmlns:a14="http://schemas.microsoft.com/office/drawing/2010/main" val="0"/>
@@ -3941,8 +3978,8 @@
         </p:blipFill>
         <p:spPr bwMode="auto">
           <a:xfrm>
-            <a:off x="1200150" y="1604962"/>
-            <a:ext cx="5661025" cy="3648075"/>
+            <a:off x="-280030" y="1366897"/>
+            <a:ext cx="5027136" cy="1949521"/>
           </a:xfrm>
           <a:prstGeom prst="rect">
             <a:avLst/>
@@ -3959,12 +3996,117 @@
           </a:extLst>
         </p:spPr>
       </p:pic>
-      <p:sp>
-        <p:nvSpPr>
-          <p:cNvPr id="4" name="TextBox 3">
-            <a:extLst>
-              <a:ext uri="{FF2B5EF4-FFF2-40B4-BE49-F238E27FC236}">
-                <a16:creationId xmlns:a16="http://schemas.microsoft.com/office/drawing/2014/main" id="{C5B3C9CB-27EC-4191-A3ED-62F71D185570}"/>
+      <p:pic>
+        <p:nvPicPr>
+          <p:cNvPr id="15" name="그림 14">
+            <a:extLst>
+              <a:ext uri="{FF2B5EF4-FFF2-40B4-BE49-F238E27FC236}">
+                <a16:creationId xmlns:a16="http://schemas.microsoft.com/office/drawing/2014/main" id="{258BC471-E296-4795-BB5F-2FA9020260F6}"/>
+              </a:ext>
+            </a:extLst>
+          </p:cNvPr>
+          <p:cNvPicPr>
+            <a:picLocks noChangeAspect="1"/>
+          </p:cNvPicPr>
+          <p:nvPr/>
+        </p:nvPicPr>
+        <p:blipFill rotWithShape="1">
+          <a:blip r:embed="rId2">
+            <a:extLst>
+              <a:ext uri="{28A0092B-C50C-407E-A947-70E740481C1C}">
+                <a14:useLocalDpi xmlns:a14="http://schemas.microsoft.com/office/drawing/2010/main" val="0"/>
+              </a:ext>
+            </a:extLst>
+          </a:blip>
+          <a:srcRect t="15338" b="26126"/>
+          <a:stretch/>
+        </p:blipFill>
+        <p:spPr>
+          <a:xfrm>
+            <a:off x="5896754" y="2942580"/>
+            <a:ext cx="5027135" cy="1605358"/>
+          </a:xfrm>
+          <a:prstGeom prst="rect">
+            <a:avLst/>
+          </a:prstGeom>
+        </p:spPr>
+      </p:pic>
+      <p:pic>
+        <p:nvPicPr>
+          <p:cNvPr id="16" name="그림 15">
+            <a:extLst>
+              <a:ext uri="{FF2B5EF4-FFF2-40B4-BE49-F238E27FC236}">
+                <a16:creationId xmlns:a16="http://schemas.microsoft.com/office/drawing/2014/main" id="{3F9F0F6E-8A76-4555-A763-C40FE06D016E}"/>
+              </a:ext>
+            </a:extLst>
+          </p:cNvPr>
+          <p:cNvPicPr>
+            <a:picLocks noChangeAspect="1"/>
+          </p:cNvPicPr>
+          <p:nvPr/>
+        </p:nvPicPr>
+        <p:blipFill rotWithShape="1">
+          <a:blip r:embed="rId2">
+            <a:extLst>
+              <a:ext uri="{28A0092B-C50C-407E-A947-70E740481C1C}">
+                <a14:useLocalDpi xmlns:a14="http://schemas.microsoft.com/office/drawing/2010/main" val="0"/>
+              </a:ext>
+            </a:extLst>
+          </a:blip>
+          <a:srcRect l="66349" t="63268" b="11972"/>
+          <a:stretch/>
+        </p:blipFill>
+        <p:spPr>
+          <a:xfrm>
+            <a:off x="9126272" y="3827424"/>
+            <a:ext cx="1691657" cy="679030"/>
+          </a:xfrm>
+          <a:prstGeom prst="rect">
+            <a:avLst/>
+          </a:prstGeom>
+        </p:spPr>
+      </p:pic>
+      <p:pic>
+        <p:nvPicPr>
+          <p:cNvPr id="13" name="그림 12">
+            <a:extLst>
+              <a:ext uri="{FF2B5EF4-FFF2-40B4-BE49-F238E27FC236}">
+                <a16:creationId xmlns:a16="http://schemas.microsoft.com/office/drawing/2014/main" id="{FAD36970-8F8D-46D4-9071-5AAB1D990FEC}"/>
+              </a:ext>
+            </a:extLst>
+          </p:cNvPr>
+          <p:cNvPicPr>
+            <a:picLocks noChangeAspect="1"/>
+          </p:cNvPicPr>
+          <p:nvPr/>
+        </p:nvPicPr>
+        <p:blipFill rotWithShape="1">
+          <a:blip r:embed="rId2">
+            <a:extLst>
+              <a:ext uri="{28A0092B-C50C-407E-A947-70E740481C1C}">
+                <a14:useLocalDpi xmlns:a14="http://schemas.microsoft.com/office/drawing/2010/main" val="0"/>
+              </a:ext>
+            </a:extLst>
+          </a:blip>
+          <a:srcRect l="27484" t="-869" b="91103"/>
+          <a:stretch/>
+        </p:blipFill>
+        <p:spPr>
+          <a:xfrm>
+            <a:off x="7115415" y="2814034"/>
+            <a:ext cx="3499334" cy="257092"/>
+          </a:xfrm>
+          <a:prstGeom prst="rect">
+            <a:avLst/>
+          </a:prstGeom>
+        </p:spPr>
+      </p:pic>
+      <p:sp>
+        <p:nvSpPr>
+          <p:cNvPr id="9" name="TextBox 8">
+            <a:extLst>
+              <a:ext uri="{FF2B5EF4-FFF2-40B4-BE49-F238E27FC236}">
+                <a16:creationId xmlns:a16="http://schemas.microsoft.com/office/drawing/2014/main" id="{3DB22FC6-BE64-49CF-8EB4-2CB490BB1A86}"/>
               </a:ext>
             </a:extLst>
           </p:cNvPr>
@@ -3973,8 +4115,8 @@
         </p:nvSpPr>
         <p:spPr>
           <a:xfrm>
-            <a:off x="1298314" y="1961600"/>
-            <a:ext cx="3171291" cy="215444"/>
+            <a:off x="6106274" y="4819582"/>
+            <a:ext cx="5277490" cy="215444"/>
           </a:xfrm>
           <a:prstGeom prst="rect">
             <a:avLst/>
@@ -3997,20 +4139,15 @@
             </a:r>
             <a:r>
               <a:rPr lang="ko-KR" altLang="en-US" sz="800" dirty="0"/>
-              <a:t>국가 가스수급 예측 플랫폼 </a:t>
-            </a:r>
-            <a:r>
-              <a:rPr lang="en-US" altLang="ko-KR" sz="800" dirty="0"/>
-              <a:t>(https://gascast.gonetis.com)</a:t>
-            </a:r>
-            <a:endParaRPr lang="ko-KR" altLang="en-US" sz="800" dirty="0"/>
+              <a:t>자체개발 발전용 가스 송출량 예측모델 일기예보 기반 시뮬레이션 결과</a:t>
+            </a:r>
           </a:p>
         </p:txBody>
       </p:sp>
     </p:spTree>
     <p:extLst>
       <p:ext uri="{BB962C8B-B14F-4D97-AF65-F5344CB8AC3E}">
-        <p14:creationId xmlns:p14="http://schemas.microsoft.com/office/powerpoint/2010/main" val="1039373978"/>
+        <p14:creationId xmlns:p14="http://schemas.microsoft.com/office/powerpoint/2010/main" val="2540317042"/>
       </p:ext>
     </p:extLst>
   </p:cSld>
@@ -4039,10 +4176,10 @@
       </p:grpSpPr>
       <p:pic>
         <p:nvPicPr>
-          <p:cNvPr id="10241" name="_x624178328">
-            <a:extLst>
-              <a:ext uri="{FF2B5EF4-FFF2-40B4-BE49-F238E27FC236}">
-                <a16:creationId xmlns:a16="http://schemas.microsoft.com/office/drawing/2014/main" id="{F49CE893-BCEC-427E-B2F9-743009BE7B0C}"/>
+          <p:cNvPr id="8195" name="_x624189416">
+            <a:extLst>
+              <a:ext uri="{FF2B5EF4-FFF2-40B4-BE49-F238E27FC236}">
+                <a16:creationId xmlns:a16="http://schemas.microsoft.com/office/drawing/2014/main" id="{9133078F-DE04-4E77-BD9A-1F5AFAE9E699}"/>
               </a:ext>
             </a:extLst>
           </p:cNvPr>
@@ -4059,15 +4196,15 @@
               </a:ext>
             </a:extLst>
           </a:blip>
-          <a:srcRect t="5043" r="1714"/>
+          <a:srcRect/>
           <a:stretch>
             <a:fillRect/>
           </a:stretch>
         </p:blipFill>
         <p:spPr bwMode="auto">
           <a:xfrm>
-            <a:off x="1200150" y="3429000"/>
-            <a:ext cx="5695950" cy="1751013"/>
+            <a:off x="1200150" y="1058862"/>
+            <a:ext cx="5624513" cy="4278313"/>
           </a:xfrm>
           <a:prstGeom prst="rect">
             <a:avLst/>
@@ -4086,10 +4223,10 @@
       </p:pic>
       <p:sp>
         <p:nvSpPr>
-          <p:cNvPr id="4" name="TextBox 3">
-            <a:extLst>
-              <a:ext uri="{FF2B5EF4-FFF2-40B4-BE49-F238E27FC236}">
-                <a16:creationId xmlns:a16="http://schemas.microsoft.com/office/drawing/2014/main" id="{C1C61E42-1A6E-4624-BD67-85F6EEE844D8}"/>
+          <p:cNvPr id="7" name="TextBox 6">
+            <a:extLst>
+              <a:ext uri="{FF2B5EF4-FFF2-40B4-BE49-F238E27FC236}">
+                <a16:creationId xmlns:a16="http://schemas.microsoft.com/office/drawing/2014/main" id="{8E334F9C-D1B6-48A6-B5C1-0BD4B7243ECD}"/>
               </a:ext>
             </a:extLst>
           </p:cNvPr>
@@ -4098,8 +4235,8 @@
         </p:nvSpPr>
         <p:spPr>
           <a:xfrm>
-            <a:off x="3724809" y="4597407"/>
-            <a:ext cx="3171291" cy="200055"/>
+            <a:off x="3681572" y="4299457"/>
+            <a:ext cx="3205537" cy="215444"/>
           </a:xfrm>
           <a:prstGeom prst="rect">
             <a:avLst/>
@@ -4113,29 +4250,29 @@
           <a:lstStyle/>
           <a:p>
             <a:r>
-              <a:rPr lang="ko-KR" altLang="en-US" sz="700" dirty="0"/>
+              <a:rPr lang="ko-KR" altLang="en-US" sz="800" dirty="0"/>
               <a:t>출처 </a:t>
             </a:r>
             <a:r>
-              <a:rPr lang="en-US" altLang="ko-KR" sz="700" dirty="0"/>
+              <a:rPr lang="en-US" altLang="ko-KR" sz="800" dirty="0"/>
               <a:t>: </a:t>
             </a:r>
             <a:r>
-              <a:rPr lang="ko-KR" altLang="en-US" sz="700" dirty="0"/>
+              <a:rPr lang="ko-KR" altLang="en-US" sz="800" dirty="0"/>
               <a:t>국가 가스수급 예측 플랫폼 </a:t>
             </a:r>
             <a:r>
-              <a:rPr lang="en-US" altLang="ko-KR" sz="700" dirty="0"/>
+              <a:rPr lang="en-US" altLang="ko-KR" sz="800" dirty="0"/>
               <a:t>(https://gascast.gonetis.com)</a:t>
             </a:r>
-            <a:endParaRPr lang="ko-KR" altLang="en-US" sz="700" dirty="0"/>
+            <a:endParaRPr lang="ko-KR" altLang="en-US" sz="800" dirty="0"/>
           </a:p>
         </p:txBody>
       </p:sp>
     </p:spTree>
     <p:extLst>
       <p:ext uri="{BB962C8B-B14F-4D97-AF65-F5344CB8AC3E}">
-        <p14:creationId xmlns:p14="http://schemas.microsoft.com/office/powerpoint/2010/main" val="3186294979"/>
+        <p14:creationId xmlns:p14="http://schemas.microsoft.com/office/powerpoint/2010/main" val="3978274045"/>
       </p:ext>
     </p:extLst>
   </p:cSld>
@@ -4164,10 +4301,10 @@
       </p:grpSpPr>
       <p:pic>
         <p:nvPicPr>
-          <p:cNvPr id="11265" name="_x624172640">
-            <a:extLst>
-              <a:ext uri="{FF2B5EF4-FFF2-40B4-BE49-F238E27FC236}">
-                <a16:creationId xmlns:a16="http://schemas.microsoft.com/office/drawing/2014/main" id="{02F436CD-878F-4AE4-8A91-4B8FDD9E16C2}"/>
+          <p:cNvPr id="9217" name="_x624180128">
+            <a:extLst>
+              <a:ext uri="{FF2B5EF4-FFF2-40B4-BE49-F238E27FC236}">
+                <a16:creationId xmlns:a16="http://schemas.microsoft.com/office/drawing/2014/main" id="{5FDA25BE-F238-4A92-A1D5-F5059ACED416}"/>
               </a:ext>
             </a:extLst>
           </p:cNvPr>
@@ -4191,8 +4328,8 @@
         </p:blipFill>
         <p:spPr bwMode="auto">
           <a:xfrm>
-            <a:off x="1200150" y="1493838"/>
-            <a:ext cx="5807075" cy="3870325"/>
+            <a:off x="1200150" y="1604962"/>
+            <a:ext cx="5661025" cy="3648075"/>
           </a:xfrm>
           <a:prstGeom prst="rect">
             <a:avLst/>
@@ -4214,7 +4351,7 @@
           <p:cNvPr id="4" name="TextBox 3">
             <a:extLst>
               <a:ext uri="{FF2B5EF4-FFF2-40B4-BE49-F238E27FC236}">
-                <a16:creationId xmlns:a16="http://schemas.microsoft.com/office/drawing/2014/main" id="{7F308581-C089-432E-9D56-5847AC2AA6E2}"/>
+                <a16:creationId xmlns:a16="http://schemas.microsoft.com/office/drawing/2014/main" id="{C5B3C9CB-27EC-4191-A3ED-62F71D185570}"/>
               </a:ext>
             </a:extLst>
           </p:cNvPr>
@@ -4223,8 +4360,8 @@
         </p:nvSpPr>
         <p:spPr>
           <a:xfrm>
-            <a:off x="3562255" y="1493837"/>
-            <a:ext cx="3171291" cy="200055"/>
+            <a:off x="1298314" y="1961600"/>
+            <a:ext cx="3171291" cy="215444"/>
           </a:xfrm>
           <a:prstGeom prst="rect">
             <a:avLst/>
@@ -4238,29 +4375,29 @@
           <a:lstStyle/>
           <a:p>
             <a:r>
-              <a:rPr lang="ko-KR" altLang="en-US" sz="700" dirty="0"/>
+              <a:rPr lang="ko-KR" altLang="en-US" sz="800" dirty="0"/>
               <a:t>출처 </a:t>
             </a:r>
             <a:r>
-              <a:rPr lang="en-US" altLang="ko-KR" sz="700" dirty="0"/>
+              <a:rPr lang="en-US" altLang="ko-KR" sz="800" dirty="0"/>
               <a:t>: </a:t>
             </a:r>
             <a:r>
-              <a:rPr lang="ko-KR" altLang="en-US" sz="700" dirty="0"/>
+              <a:rPr lang="ko-KR" altLang="en-US" sz="800" dirty="0"/>
               <a:t>국가 가스수급 예측 플랫폼 </a:t>
             </a:r>
             <a:r>
-              <a:rPr lang="en-US" altLang="ko-KR" sz="700" dirty="0"/>
+              <a:rPr lang="en-US" altLang="ko-KR" sz="800" dirty="0"/>
               <a:t>(https://gascast.gonetis.com)</a:t>
             </a:r>
-            <a:endParaRPr lang="ko-KR" altLang="en-US" sz="700" dirty="0"/>
+            <a:endParaRPr lang="ko-KR" altLang="en-US" sz="800" dirty="0"/>
           </a:p>
         </p:txBody>
       </p:sp>
     </p:spTree>
     <p:extLst>
       <p:ext uri="{BB962C8B-B14F-4D97-AF65-F5344CB8AC3E}">
-        <p14:creationId xmlns:p14="http://schemas.microsoft.com/office/powerpoint/2010/main" val="3716949905"/>
+        <p14:creationId xmlns:p14="http://schemas.microsoft.com/office/powerpoint/2010/main" val="1039373978"/>
       </p:ext>
     </p:extLst>
   </p:cSld>
@@ -4289,10 +4426,10 @@
       </p:grpSpPr>
       <p:pic>
         <p:nvPicPr>
-          <p:cNvPr id="12289" name="_x624172352">
-            <a:extLst>
-              <a:ext uri="{FF2B5EF4-FFF2-40B4-BE49-F238E27FC236}">
-                <a16:creationId xmlns:a16="http://schemas.microsoft.com/office/drawing/2014/main" id="{75C85392-5A40-4865-8C45-D8F0C508413F}"/>
+          <p:cNvPr id="10241" name="_x624178328">
+            <a:extLst>
+              <a:ext uri="{FF2B5EF4-FFF2-40B4-BE49-F238E27FC236}">
+                <a16:creationId xmlns:a16="http://schemas.microsoft.com/office/drawing/2014/main" id="{F49CE893-BCEC-427E-B2F9-743009BE7B0C}"/>
               </a:ext>
             </a:extLst>
           </p:cNvPr>
@@ -4309,15 +4446,15 @@
               </a:ext>
             </a:extLst>
           </a:blip>
-          <a:srcRect t="32326" b="27965"/>
+          <a:srcRect t="5043" r="1714"/>
           <a:stretch>
             <a:fillRect/>
           </a:stretch>
         </p:blipFill>
         <p:spPr bwMode="auto">
           <a:xfrm>
-            <a:off x="1200150" y="3975100"/>
-            <a:ext cx="5508625" cy="1362075"/>
+            <a:off x="1200150" y="3429000"/>
+            <a:ext cx="5695950" cy="1751013"/>
           </a:xfrm>
           <a:prstGeom prst="rect">
             <a:avLst/>
@@ -4339,7 +4476,7 @@
           <p:cNvPr id="4" name="TextBox 3">
             <a:extLst>
               <a:ext uri="{FF2B5EF4-FFF2-40B4-BE49-F238E27FC236}">
-                <a16:creationId xmlns:a16="http://schemas.microsoft.com/office/drawing/2014/main" id="{DB606497-6774-4B4C-878C-2FFAE5A554B3}"/>
+                <a16:creationId xmlns:a16="http://schemas.microsoft.com/office/drawing/2014/main" id="{C1C61E42-1A6E-4624-BD67-85F6EEE844D8}"/>
               </a:ext>
             </a:extLst>
           </p:cNvPr>
@@ -4348,7 +4485,7 @@
         </p:nvSpPr>
         <p:spPr>
           <a:xfrm>
-            <a:off x="3710536" y="3975100"/>
+            <a:off x="3724809" y="4597407"/>
             <a:ext cx="3171291" cy="200055"/>
           </a:xfrm>
           <a:prstGeom prst="rect">
@@ -4385,7 +4522,7 @@
     </p:spTree>
     <p:extLst>
       <p:ext uri="{BB962C8B-B14F-4D97-AF65-F5344CB8AC3E}">
-        <p14:creationId xmlns:p14="http://schemas.microsoft.com/office/powerpoint/2010/main" val="3041315795"/>
+        <p14:creationId xmlns:p14="http://schemas.microsoft.com/office/powerpoint/2010/main" val="3186294979"/>
       </p:ext>
     </p:extLst>
   </p:cSld>
@@ -4412,6 +4549,256 @@
           <a:chExt cx="0" cy="0"/>
         </a:xfrm>
       </p:grpSpPr>
+      <p:pic>
+        <p:nvPicPr>
+          <p:cNvPr id="11265" name="_x624172640">
+            <a:extLst>
+              <a:ext uri="{FF2B5EF4-FFF2-40B4-BE49-F238E27FC236}">
+                <a16:creationId xmlns:a16="http://schemas.microsoft.com/office/drawing/2014/main" id="{02F436CD-878F-4AE4-8A91-4B8FDD9E16C2}"/>
+              </a:ext>
+            </a:extLst>
+          </p:cNvPr>
+          <p:cNvPicPr>
+            <a:picLocks noChangeAspect="1" noChangeArrowheads="1"/>
+          </p:cNvPicPr>
+          <p:nvPr/>
+        </p:nvPicPr>
+        <p:blipFill>
+          <a:blip r:embed="rId2">
+            <a:extLst>
+              <a:ext uri="{28A0092B-C50C-407E-A947-70E740481C1C}">
+                <a14:useLocalDpi xmlns:a14="http://schemas.microsoft.com/office/drawing/2010/main" val="0"/>
+              </a:ext>
+            </a:extLst>
+          </a:blip>
+          <a:srcRect/>
+          <a:stretch>
+            <a:fillRect/>
+          </a:stretch>
+        </p:blipFill>
+        <p:spPr bwMode="auto">
+          <a:xfrm>
+            <a:off x="1200150" y="1493838"/>
+            <a:ext cx="5807075" cy="3870325"/>
+          </a:xfrm>
+          <a:prstGeom prst="rect">
+            <a:avLst/>
+          </a:prstGeom>
+          <a:noFill/>
+          <a:extLst>
+            <a:ext uri="{909E8E84-426E-40DD-AFC4-6F175D3DCCD1}">
+              <a14:hiddenFill xmlns:a14="http://schemas.microsoft.com/office/drawing/2010/main">
+                <a:solidFill>
+                  <a:srgbClr val="FFFFFF"/>
+                </a:solidFill>
+              </a14:hiddenFill>
+            </a:ext>
+          </a:extLst>
+        </p:spPr>
+      </p:pic>
+      <p:sp>
+        <p:nvSpPr>
+          <p:cNvPr id="4" name="TextBox 3">
+            <a:extLst>
+              <a:ext uri="{FF2B5EF4-FFF2-40B4-BE49-F238E27FC236}">
+                <a16:creationId xmlns:a16="http://schemas.microsoft.com/office/drawing/2014/main" id="{7F308581-C089-432E-9D56-5847AC2AA6E2}"/>
+              </a:ext>
+            </a:extLst>
+          </p:cNvPr>
+          <p:cNvSpPr txBox="1"/>
+          <p:nvPr/>
+        </p:nvSpPr>
+        <p:spPr>
+          <a:xfrm>
+            <a:off x="3562255" y="1493837"/>
+            <a:ext cx="3171291" cy="200055"/>
+          </a:xfrm>
+          <a:prstGeom prst="rect">
+            <a:avLst/>
+          </a:prstGeom>
+          <a:noFill/>
+        </p:spPr>
+        <p:txBody>
+          <a:bodyPr wrap="square" rtlCol="0">
+            <a:spAutoFit/>
+          </a:bodyPr>
+          <a:lstStyle/>
+          <a:p>
+            <a:r>
+              <a:rPr lang="ko-KR" altLang="en-US" sz="700" dirty="0"/>
+              <a:t>출처 </a:t>
+            </a:r>
+            <a:r>
+              <a:rPr lang="en-US" altLang="ko-KR" sz="700" dirty="0"/>
+              <a:t>: </a:t>
+            </a:r>
+            <a:r>
+              <a:rPr lang="ko-KR" altLang="en-US" sz="700" dirty="0"/>
+              <a:t>국가 가스수급 예측 플랫폼 </a:t>
+            </a:r>
+            <a:r>
+              <a:rPr lang="en-US" altLang="ko-KR" sz="700" dirty="0"/>
+              <a:t>(https://gascast.gonetis.com)</a:t>
+            </a:r>
+            <a:endParaRPr lang="ko-KR" altLang="en-US" sz="700" dirty="0"/>
+          </a:p>
+        </p:txBody>
+      </p:sp>
+    </p:spTree>
+    <p:extLst>
+      <p:ext uri="{BB962C8B-B14F-4D97-AF65-F5344CB8AC3E}">
+        <p14:creationId xmlns:p14="http://schemas.microsoft.com/office/powerpoint/2010/main" val="3716949905"/>
+      </p:ext>
+    </p:extLst>
+  </p:cSld>
+  <p:clrMapOvr>
+    <a:masterClrMapping/>
+  </p:clrMapOvr>
+</p:sld>
+</file>
+
+<file path=ppt/slides/slide15.xml><?xml version="1.0" encoding="utf-8"?>
+<p:sld xmlns:a="http://schemas.openxmlformats.org/drawingml/2006/main" xmlns:r="http://schemas.openxmlformats.org/officeDocument/2006/relationships" xmlns:p="http://schemas.openxmlformats.org/presentationml/2006/main">
+  <p:cSld>
+    <p:spTree>
+      <p:nvGrpSpPr>
+        <p:cNvPr id="1" name=""/>
+        <p:cNvGrpSpPr/>
+        <p:nvPr/>
+      </p:nvGrpSpPr>
+      <p:grpSpPr>
+        <a:xfrm>
+          <a:off x="0" y="0"/>
+          <a:ext cx="0" cy="0"/>
+          <a:chOff x="0" y="0"/>
+          <a:chExt cx="0" cy="0"/>
+        </a:xfrm>
+      </p:grpSpPr>
+      <p:pic>
+        <p:nvPicPr>
+          <p:cNvPr id="12289" name="_x624172352">
+            <a:extLst>
+              <a:ext uri="{FF2B5EF4-FFF2-40B4-BE49-F238E27FC236}">
+                <a16:creationId xmlns:a16="http://schemas.microsoft.com/office/drawing/2014/main" id="{75C85392-5A40-4865-8C45-D8F0C508413F}"/>
+              </a:ext>
+            </a:extLst>
+          </p:cNvPr>
+          <p:cNvPicPr>
+            <a:picLocks noChangeAspect="1" noChangeArrowheads="1"/>
+          </p:cNvPicPr>
+          <p:nvPr/>
+        </p:nvPicPr>
+        <p:blipFill>
+          <a:blip r:embed="rId2">
+            <a:extLst>
+              <a:ext uri="{28A0092B-C50C-407E-A947-70E740481C1C}">
+                <a14:useLocalDpi xmlns:a14="http://schemas.microsoft.com/office/drawing/2010/main" val="0"/>
+              </a:ext>
+            </a:extLst>
+          </a:blip>
+          <a:srcRect t="32326" b="27965"/>
+          <a:stretch>
+            <a:fillRect/>
+          </a:stretch>
+        </p:blipFill>
+        <p:spPr bwMode="auto">
+          <a:xfrm>
+            <a:off x="1200150" y="3975100"/>
+            <a:ext cx="5508625" cy="1362075"/>
+          </a:xfrm>
+          <a:prstGeom prst="rect">
+            <a:avLst/>
+          </a:prstGeom>
+          <a:noFill/>
+          <a:extLst>
+            <a:ext uri="{909E8E84-426E-40DD-AFC4-6F175D3DCCD1}">
+              <a14:hiddenFill xmlns:a14="http://schemas.microsoft.com/office/drawing/2010/main">
+                <a:solidFill>
+                  <a:srgbClr val="FFFFFF"/>
+                </a:solidFill>
+              </a14:hiddenFill>
+            </a:ext>
+          </a:extLst>
+        </p:spPr>
+      </p:pic>
+      <p:sp>
+        <p:nvSpPr>
+          <p:cNvPr id="4" name="TextBox 3">
+            <a:extLst>
+              <a:ext uri="{FF2B5EF4-FFF2-40B4-BE49-F238E27FC236}">
+                <a16:creationId xmlns:a16="http://schemas.microsoft.com/office/drawing/2014/main" id="{DB606497-6774-4B4C-878C-2FFAE5A554B3}"/>
+              </a:ext>
+            </a:extLst>
+          </p:cNvPr>
+          <p:cNvSpPr txBox="1"/>
+          <p:nvPr/>
+        </p:nvSpPr>
+        <p:spPr>
+          <a:xfrm>
+            <a:off x="3710536" y="3975100"/>
+            <a:ext cx="3171291" cy="200055"/>
+          </a:xfrm>
+          <a:prstGeom prst="rect">
+            <a:avLst/>
+          </a:prstGeom>
+          <a:noFill/>
+        </p:spPr>
+        <p:txBody>
+          <a:bodyPr wrap="square" rtlCol="0">
+            <a:spAutoFit/>
+          </a:bodyPr>
+          <a:lstStyle/>
+          <a:p>
+            <a:r>
+              <a:rPr lang="ko-KR" altLang="en-US" sz="700" dirty="0"/>
+              <a:t>출처 </a:t>
+            </a:r>
+            <a:r>
+              <a:rPr lang="en-US" altLang="ko-KR" sz="700" dirty="0"/>
+              <a:t>: </a:t>
+            </a:r>
+            <a:r>
+              <a:rPr lang="ko-KR" altLang="en-US" sz="700" dirty="0"/>
+              <a:t>국가 가스수급 예측 플랫폼 </a:t>
+            </a:r>
+            <a:r>
+              <a:rPr lang="en-US" altLang="ko-KR" sz="700" dirty="0"/>
+              <a:t>(https://gascast.gonetis.com)</a:t>
+            </a:r>
+            <a:endParaRPr lang="ko-KR" altLang="en-US" sz="700" dirty="0"/>
+          </a:p>
+        </p:txBody>
+      </p:sp>
+    </p:spTree>
+    <p:extLst>
+      <p:ext uri="{BB962C8B-B14F-4D97-AF65-F5344CB8AC3E}">
+        <p14:creationId xmlns:p14="http://schemas.microsoft.com/office/powerpoint/2010/main" val="3041315795"/>
+      </p:ext>
+    </p:extLst>
+  </p:cSld>
+  <p:clrMapOvr>
+    <a:masterClrMapping/>
+  </p:clrMapOvr>
+</p:sld>
+</file>
+
+<file path=ppt/slides/slide16.xml><?xml version="1.0" encoding="utf-8"?>
+<p:sld xmlns:a="http://schemas.openxmlformats.org/drawingml/2006/main" xmlns:r="http://schemas.openxmlformats.org/officeDocument/2006/relationships" xmlns:p="http://schemas.openxmlformats.org/presentationml/2006/main">
+  <p:cSld>
+    <p:spTree>
+      <p:nvGrpSpPr>
+        <p:cNvPr id="1" name=""/>
+        <p:cNvGrpSpPr/>
+        <p:nvPr/>
+      </p:nvGrpSpPr>
+      <p:grpSpPr>
+        <a:xfrm>
+          <a:off x="0" y="0"/>
+          <a:ext cx="0" cy="0"/>
+          <a:chOff x="0" y="0"/>
+          <a:chExt cx="0" cy="0"/>
+        </a:xfrm>
+      </p:grpSpPr>
       <p:sp>
         <p:nvSpPr>
           <p:cNvPr id="6" name="TextBox 5">
@@ -4546,7 +4933,7 @@
 </p:sld>
 </file>
 
-<file path=ppt/slides/slide15.xml><?xml version="1.0" encoding="utf-8"?>
+<file path=ppt/slides/slide17.xml><?xml version="1.0" encoding="utf-8"?>
 <p:sld xmlns:a="http://schemas.openxmlformats.org/drawingml/2006/main" xmlns:r="http://schemas.openxmlformats.org/officeDocument/2006/relationships" xmlns:p="http://schemas.openxmlformats.org/presentationml/2006/main">
   <p:cSld>
     <p:spTree>
@@ -6038,10 +6425,10 @@
       </p:grpSpPr>
       <p:pic>
         <p:nvPicPr>
-          <p:cNvPr id="4" name="_x624178472">
-            <a:extLst>
-              <a:ext uri="{FF2B5EF4-FFF2-40B4-BE49-F238E27FC236}">
-                <a16:creationId xmlns:a16="http://schemas.microsoft.com/office/drawing/2014/main" id="{227D2D49-4455-4F5D-B99F-161590DE2314}"/>
+          <p:cNvPr id="1027" name="_x447540032">
+            <a:extLst>
+              <a:ext uri="{FF2B5EF4-FFF2-40B4-BE49-F238E27FC236}">
+                <a16:creationId xmlns:a16="http://schemas.microsoft.com/office/drawing/2014/main" id="{EDD0117F-9861-4244-9209-7BC3F13D4F8B}"/>
               </a:ext>
             </a:extLst>
           </p:cNvPr>
@@ -6050,7 +6437,7 @@
           </p:cNvPicPr>
           <p:nvPr/>
         </p:nvPicPr>
-        <p:blipFill>
+        <p:blipFill rotWithShape="1">
           <a:blip r:embed="rId2">
             <a:extLst>
               <a:ext uri="{28A0092B-C50C-407E-A947-70E740481C1C}">
@@ -6058,15 +6445,13 @@
               </a:ext>
             </a:extLst>
           </a:blip>
-          <a:srcRect/>
-          <a:stretch>
-            <a:fillRect/>
-          </a:stretch>
+          <a:srcRect t="95874"/>
+          <a:stretch/>
         </p:blipFill>
         <p:spPr bwMode="auto">
           <a:xfrm>
-            <a:off x="1325327" y="1479479"/>
-            <a:ext cx="5027136" cy="1949521"/>
+            <a:off x="2830664" y="2926937"/>
+            <a:ext cx="5353050" cy="45719"/>
           </a:xfrm>
           <a:prstGeom prst="rect">
             <a:avLst/>
@@ -6083,55 +6468,12 @@
           </a:extLst>
         </p:spPr>
       </p:pic>
-      <p:sp>
-        <p:nvSpPr>
-          <p:cNvPr id="5" name="TextBox 4">
-            <a:extLst>
-              <a:ext uri="{FF2B5EF4-FFF2-40B4-BE49-F238E27FC236}">
-                <a16:creationId xmlns:a16="http://schemas.microsoft.com/office/drawing/2014/main" id="{89E94AEE-2622-4421-8B80-EA13CE0C33F8}"/>
-              </a:ext>
-            </a:extLst>
-          </p:cNvPr>
-          <p:cNvSpPr txBox="1"/>
-          <p:nvPr/>
-        </p:nvSpPr>
-        <p:spPr>
-          <a:xfrm>
-            <a:off x="1539961" y="3429000"/>
-            <a:ext cx="5277490" cy="215444"/>
-          </a:xfrm>
-          <a:prstGeom prst="rect">
-            <a:avLst/>
-          </a:prstGeom>
-          <a:noFill/>
-        </p:spPr>
-        <p:txBody>
-          <a:bodyPr wrap="square" rtlCol="0">
-            <a:spAutoFit/>
-          </a:bodyPr>
-          <a:lstStyle/>
-          <a:p>
-            <a:r>
-              <a:rPr lang="ko-KR" altLang="en-US" sz="800" dirty="0"/>
-              <a:t>출처 </a:t>
-            </a:r>
-            <a:r>
-              <a:rPr lang="en-US" altLang="ko-KR" sz="800" dirty="0"/>
-              <a:t>: </a:t>
-            </a:r>
-            <a:r>
-              <a:rPr lang="ko-KR" altLang="en-US" sz="800" dirty="0"/>
-              <a:t>자체개발 발전용 가스 송출량 예측모델 일기예보 기반 시뮬레이션 결과</a:t>
-            </a:r>
-          </a:p>
-        </p:txBody>
-      </p:sp>
       <p:pic>
         <p:nvPicPr>
-          <p:cNvPr id="14337" name="_x850085272">
-            <a:extLst>
-              <a:ext uri="{FF2B5EF4-FFF2-40B4-BE49-F238E27FC236}">
-                <a16:creationId xmlns:a16="http://schemas.microsoft.com/office/drawing/2014/main" id="{9827E87C-FFF5-4ED6-AD02-D86430234067}"/>
+          <p:cNvPr id="8" name="_x447540032">
+            <a:extLst>
+              <a:ext uri="{FF2B5EF4-FFF2-40B4-BE49-F238E27FC236}">
+                <a16:creationId xmlns:a16="http://schemas.microsoft.com/office/drawing/2014/main" id="{B5A4B835-F6A5-470F-8AF5-6B8A4F2BCDF9}"/>
               </a:ext>
             </a:extLst>
           </p:cNvPr>
@@ -6140,23 +6482,21 @@
           </p:cNvPicPr>
           <p:nvPr/>
         </p:nvPicPr>
-        <p:blipFill>
-          <a:blip r:embed="rId3">
+        <p:blipFill rotWithShape="1">
+          <a:blip r:embed="rId2">
             <a:extLst>
               <a:ext uri="{28A0092B-C50C-407E-A947-70E740481C1C}">
                 <a14:useLocalDpi xmlns:a14="http://schemas.microsoft.com/office/drawing/2010/main" val="0"/>
               </a:ext>
             </a:extLst>
           </a:blip>
-          <a:srcRect t="4666" r="2028" b="3600"/>
-          <a:stretch>
-            <a:fillRect/>
-          </a:stretch>
+          <a:srcRect b="13753"/>
+          <a:stretch/>
         </p:blipFill>
         <p:spPr bwMode="auto">
           <a:xfrm>
-            <a:off x="1647022" y="4630706"/>
-            <a:ext cx="5610225" cy="1104900"/>
+            <a:off x="2830664" y="1971262"/>
+            <a:ext cx="5353050" cy="955675"/>
           </a:xfrm>
           <a:prstGeom prst="rect">
             <a:avLst/>
@@ -6173,64 +6513,10 @@
           </a:extLst>
         </p:spPr>
       </p:pic>
-      <p:sp>
-        <p:nvSpPr>
-          <p:cNvPr id="10" name="TextBox 9">
-            <a:extLst>
-              <a:ext uri="{FF2B5EF4-FFF2-40B4-BE49-F238E27FC236}">
-                <a16:creationId xmlns:a16="http://schemas.microsoft.com/office/drawing/2014/main" id="{21CA34BE-F7D0-4AB2-A172-29D85B07EA3A}"/>
-              </a:ext>
-            </a:extLst>
-          </p:cNvPr>
-          <p:cNvSpPr txBox="1"/>
-          <p:nvPr/>
-        </p:nvSpPr>
-        <p:spPr>
-          <a:xfrm>
-            <a:off x="1647022" y="5566329"/>
-            <a:ext cx="2051675" cy="338554"/>
-          </a:xfrm>
-          <a:prstGeom prst="rect">
-            <a:avLst/>
-          </a:prstGeom>
-          <a:noFill/>
-        </p:spPr>
-        <p:txBody>
-          <a:bodyPr wrap="square" rtlCol="0">
-            <a:spAutoFit/>
-          </a:bodyPr>
-          <a:lstStyle/>
-          <a:p>
-            <a:r>
-              <a:rPr lang="ko-KR" altLang="en-US" sz="800" dirty="0"/>
-              <a:t>출처 </a:t>
-            </a:r>
-            <a:r>
-              <a:rPr lang="en-US" altLang="ko-KR" sz="800" dirty="0"/>
-              <a:t>: </a:t>
-            </a:r>
-            <a:r>
-              <a:rPr lang="ko-KR" altLang="en-US" sz="800" dirty="0"/>
-              <a:t>기상청 </a:t>
-            </a:r>
-            <a:r>
-              <a:rPr lang="en-US" altLang="ko-KR" sz="800" dirty="0"/>
-              <a:t>KIM-</a:t>
-            </a:r>
-            <a:r>
-              <a:rPr lang="ko-KR" altLang="en-US" sz="800" dirty="0"/>
-              <a:t>전구 수치모델  </a:t>
-            </a:r>
-          </a:p>
-          <a:p>
-            <a:endParaRPr lang="ko-KR" altLang="en-US" sz="800" dirty="0"/>
-          </a:p>
-        </p:txBody>
-      </p:sp>
     </p:spTree>
     <p:extLst>
       <p:ext uri="{BB962C8B-B14F-4D97-AF65-F5344CB8AC3E}">
-        <p14:creationId xmlns:p14="http://schemas.microsoft.com/office/powerpoint/2010/main" val="3767253006"/>
+        <p14:creationId xmlns:p14="http://schemas.microsoft.com/office/powerpoint/2010/main" val="3599154637"/>
       </p:ext>
     </p:extLst>
   </p:cSld>
@@ -6259,10 +6545,10 @@
       </p:grpSpPr>
       <p:pic>
         <p:nvPicPr>
-          <p:cNvPr id="8195" name="_x624189416">
-            <a:extLst>
-              <a:ext uri="{FF2B5EF4-FFF2-40B4-BE49-F238E27FC236}">
-                <a16:creationId xmlns:a16="http://schemas.microsoft.com/office/drawing/2014/main" id="{9133078F-DE04-4E77-BD9A-1F5AFAE9E699}"/>
+          <p:cNvPr id="4" name="_x624178472">
+            <a:extLst>
+              <a:ext uri="{FF2B5EF4-FFF2-40B4-BE49-F238E27FC236}">
+                <a16:creationId xmlns:a16="http://schemas.microsoft.com/office/drawing/2014/main" id="{227D2D49-4455-4F5D-B99F-161590DE2314}"/>
               </a:ext>
             </a:extLst>
           </p:cNvPr>
@@ -6286,8 +6572,8 @@
         </p:blipFill>
         <p:spPr bwMode="auto">
           <a:xfrm>
-            <a:off x="1200150" y="1058862"/>
-            <a:ext cx="5624513" cy="4278313"/>
+            <a:off x="1325327" y="1479479"/>
+            <a:ext cx="5027136" cy="1949521"/>
           </a:xfrm>
           <a:prstGeom prst="rect">
             <a:avLst/>
@@ -6306,10 +6592,10 @@
       </p:pic>
       <p:sp>
         <p:nvSpPr>
-          <p:cNvPr id="7" name="TextBox 6">
-            <a:extLst>
-              <a:ext uri="{FF2B5EF4-FFF2-40B4-BE49-F238E27FC236}">
-                <a16:creationId xmlns:a16="http://schemas.microsoft.com/office/drawing/2014/main" id="{8E334F9C-D1B6-48A6-B5C1-0BD4B7243ECD}"/>
+          <p:cNvPr id="5" name="TextBox 4">
+            <a:extLst>
+              <a:ext uri="{FF2B5EF4-FFF2-40B4-BE49-F238E27FC236}">
+                <a16:creationId xmlns:a16="http://schemas.microsoft.com/office/drawing/2014/main" id="{89E94AEE-2622-4421-8B80-EA13CE0C33F8}"/>
               </a:ext>
             </a:extLst>
           </p:cNvPr>
@@ -6318,8 +6604,8 @@
         </p:nvSpPr>
         <p:spPr>
           <a:xfrm>
-            <a:off x="3681572" y="4299457"/>
-            <a:ext cx="3205537" cy="215444"/>
+            <a:off x="1539961" y="3429000"/>
+            <a:ext cx="5277490" cy="215444"/>
           </a:xfrm>
           <a:prstGeom prst="rect">
             <a:avLst/>
@@ -6342,20 +6628,216 @@
             </a:r>
             <a:r>
               <a:rPr lang="ko-KR" altLang="en-US" sz="800" dirty="0"/>
-              <a:t>국가 가스수급 예측 플랫폼 </a:t>
+              <a:t>자체개발 발전용 가스 송출량 예측모델 일기예보 기반 시뮬레이션 결과</a:t>
+            </a:r>
+          </a:p>
+        </p:txBody>
+      </p:sp>
+      <p:pic>
+        <p:nvPicPr>
+          <p:cNvPr id="14337" name="_x850085272">
+            <a:extLst>
+              <a:ext uri="{FF2B5EF4-FFF2-40B4-BE49-F238E27FC236}">
+                <a16:creationId xmlns:a16="http://schemas.microsoft.com/office/drawing/2014/main" id="{9827E87C-FFF5-4ED6-AD02-D86430234067}"/>
+              </a:ext>
+            </a:extLst>
+          </p:cNvPr>
+          <p:cNvPicPr>
+            <a:picLocks noChangeAspect="1" noChangeArrowheads="1"/>
+          </p:cNvPicPr>
+          <p:nvPr/>
+        </p:nvPicPr>
+        <p:blipFill>
+          <a:blip r:embed="rId3">
+            <a:extLst>
+              <a:ext uri="{28A0092B-C50C-407E-A947-70E740481C1C}">
+                <a14:useLocalDpi xmlns:a14="http://schemas.microsoft.com/office/drawing/2010/main" val="0"/>
+              </a:ext>
+            </a:extLst>
+          </a:blip>
+          <a:srcRect t="4666" r="2028" b="3600"/>
+          <a:stretch>
+            <a:fillRect/>
+          </a:stretch>
+        </p:blipFill>
+        <p:spPr bwMode="auto">
+          <a:xfrm>
+            <a:off x="1647022" y="4630706"/>
+            <a:ext cx="5610225" cy="1104900"/>
+          </a:xfrm>
+          <a:prstGeom prst="rect">
+            <a:avLst/>
+          </a:prstGeom>
+          <a:noFill/>
+          <a:extLst>
+            <a:ext uri="{909E8E84-426E-40DD-AFC4-6F175D3DCCD1}">
+              <a14:hiddenFill xmlns:a14="http://schemas.microsoft.com/office/drawing/2010/main">
+                <a:solidFill>
+                  <a:srgbClr val="FFFFFF"/>
+                </a:solidFill>
+              </a14:hiddenFill>
+            </a:ext>
+          </a:extLst>
+        </p:spPr>
+      </p:pic>
+      <p:sp>
+        <p:nvSpPr>
+          <p:cNvPr id="10" name="TextBox 9">
+            <a:extLst>
+              <a:ext uri="{FF2B5EF4-FFF2-40B4-BE49-F238E27FC236}">
+                <a16:creationId xmlns:a16="http://schemas.microsoft.com/office/drawing/2014/main" id="{21CA34BE-F7D0-4AB2-A172-29D85B07EA3A}"/>
+              </a:ext>
+            </a:extLst>
+          </p:cNvPr>
+          <p:cNvSpPr txBox="1"/>
+          <p:nvPr/>
+        </p:nvSpPr>
+        <p:spPr>
+          <a:xfrm>
+            <a:off x="1647022" y="5566329"/>
+            <a:ext cx="2051675" cy="338554"/>
+          </a:xfrm>
+          <a:prstGeom prst="rect">
+            <a:avLst/>
+          </a:prstGeom>
+          <a:noFill/>
+        </p:spPr>
+        <p:txBody>
+          <a:bodyPr wrap="square" rtlCol="0">
+            <a:spAutoFit/>
+          </a:bodyPr>
+          <a:lstStyle/>
+          <a:p>
+            <a:r>
+              <a:rPr lang="ko-KR" altLang="en-US" sz="800" dirty="0"/>
+              <a:t>출처 </a:t>
             </a:r>
             <a:r>
               <a:rPr lang="en-US" altLang="ko-KR" sz="800" dirty="0"/>
-              <a:t>(https://gascast.gonetis.com)</a:t>
-            </a:r>
+              <a:t>: </a:t>
+            </a:r>
+            <a:r>
+              <a:rPr lang="ko-KR" altLang="en-US" sz="800" dirty="0"/>
+              <a:t>기상청 </a:t>
+            </a:r>
+            <a:r>
+              <a:rPr lang="en-US" altLang="ko-KR" sz="800" dirty="0"/>
+              <a:t>KIM-</a:t>
+            </a:r>
+            <a:r>
+              <a:rPr lang="ko-KR" altLang="en-US" sz="800" dirty="0"/>
+              <a:t>전구 수치모델  </a:t>
+            </a:r>
+          </a:p>
+          <a:p>
             <a:endParaRPr lang="ko-KR" altLang="en-US" sz="800" dirty="0"/>
           </a:p>
         </p:txBody>
       </p:sp>
+      <p:pic>
+        <p:nvPicPr>
+          <p:cNvPr id="3" name="그림 2">
+            <a:extLst>
+              <a:ext uri="{FF2B5EF4-FFF2-40B4-BE49-F238E27FC236}">
+                <a16:creationId xmlns:a16="http://schemas.microsoft.com/office/drawing/2014/main" id="{F8B53FD9-AE02-4998-A4F8-D574A24A09BF}"/>
+              </a:ext>
+            </a:extLst>
+          </p:cNvPr>
+          <p:cNvPicPr>
+            <a:picLocks noChangeAspect="1"/>
+          </p:cNvPicPr>
+          <p:nvPr/>
+        </p:nvPicPr>
+        <p:blipFill rotWithShape="1">
+          <a:blip r:embed="rId4">
+            <a:extLst>
+              <a:ext uri="{28A0092B-C50C-407E-A947-70E740481C1C}">
+                <a14:useLocalDpi xmlns:a14="http://schemas.microsoft.com/office/drawing/2010/main" val="0"/>
+              </a:ext>
+            </a:extLst>
+          </a:blip>
+          <a:srcRect t="15338"/>
+          <a:stretch/>
+        </p:blipFill>
+        <p:spPr>
+          <a:xfrm>
+            <a:off x="3825084" y="1693628"/>
+            <a:ext cx="6826955" cy="3153114"/>
+          </a:xfrm>
+          <a:prstGeom prst="rect">
+            <a:avLst/>
+          </a:prstGeom>
+        </p:spPr>
+      </p:pic>
+      <p:pic>
+        <p:nvPicPr>
+          <p:cNvPr id="8" name="그림 7">
+            <a:extLst>
+              <a:ext uri="{FF2B5EF4-FFF2-40B4-BE49-F238E27FC236}">
+                <a16:creationId xmlns:a16="http://schemas.microsoft.com/office/drawing/2014/main" id="{55E937C1-1F08-4B13-9171-1A000E74A3A5}"/>
+              </a:ext>
+            </a:extLst>
+          </p:cNvPr>
+          <p:cNvPicPr>
+            <a:picLocks noChangeAspect="1"/>
+          </p:cNvPicPr>
+          <p:nvPr/>
+        </p:nvPicPr>
+        <p:blipFill rotWithShape="1">
+          <a:blip r:embed="rId4">
+            <a:extLst>
+              <a:ext uri="{28A0092B-C50C-407E-A947-70E740481C1C}">
+                <a14:useLocalDpi xmlns:a14="http://schemas.microsoft.com/office/drawing/2010/main" val="0"/>
+              </a:ext>
+            </a:extLst>
+          </a:blip>
+          <a:srcRect b="91103"/>
+          <a:stretch/>
+        </p:blipFill>
+        <p:spPr>
+          <a:xfrm>
+            <a:off x="3825084" y="1527943"/>
+            <a:ext cx="6826955" cy="331369"/>
+          </a:xfrm>
+          <a:prstGeom prst="rect">
+            <a:avLst/>
+          </a:prstGeom>
+        </p:spPr>
+      </p:pic>
+      <p:pic>
+        <p:nvPicPr>
+          <p:cNvPr id="6" name="그림 5">
+            <a:extLst>
+              <a:ext uri="{FF2B5EF4-FFF2-40B4-BE49-F238E27FC236}">
+                <a16:creationId xmlns:a16="http://schemas.microsoft.com/office/drawing/2014/main" id="{19E22552-0212-453B-83A8-F8E39E9C72AE}"/>
+              </a:ext>
+            </a:extLst>
+          </p:cNvPr>
+          <p:cNvPicPr>
+            <a:picLocks noChangeAspect="1"/>
+          </p:cNvPicPr>
+          <p:nvPr/>
+        </p:nvPicPr>
+        <p:blipFill>
+          <a:blip r:embed="rId5"/>
+          <a:stretch>
+            <a:fillRect/>
+          </a:stretch>
+        </p:blipFill>
+        <p:spPr>
+          <a:xfrm>
+            <a:off x="970521" y="3935709"/>
+            <a:ext cx="6828112" cy="3316511"/>
+          </a:xfrm>
+          <a:prstGeom prst="rect">
+            <a:avLst/>
+          </a:prstGeom>
+        </p:spPr>
+      </p:pic>
     </p:spTree>
     <p:extLst>
       <p:ext uri="{BB962C8B-B14F-4D97-AF65-F5344CB8AC3E}">
-        <p14:creationId xmlns:p14="http://schemas.microsoft.com/office/powerpoint/2010/main" val="3978274045"/>
+        <p14:creationId xmlns:p14="http://schemas.microsoft.com/office/powerpoint/2010/main" val="3767253006"/>
       </p:ext>
     </p:extLst>
   </p:cSld>
